--- a/powerpoint/Condors_2.pptx
+++ b/powerpoint/Condors_2.pptx
@@ -5226,10 +5226,10 @@
       </p:sp>
       <p:pic>
         <p:nvPicPr>
-          <p:cNvPr id="3" name="Picture 2" descr="A graph of different colored lines&#10;&#10;AI-generated content may be incorrect.">
+          <p:cNvPr id="7" name="Picture 6" descr="A graph of different colored lines&#10;&#10;AI-generated content may be incorrect.">
             <a:extLst>
               <a:ext uri="{FF2B5EF4-FFF2-40B4-BE49-F238E27FC236}">
-                <a16:creationId xmlns:a16="http://schemas.microsoft.com/office/drawing/2014/main" id="{6BB40046-B35A-C469-C023-F9895BC19507}"/>
+                <a16:creationId xmlns:a16="http://schemas.microsoft.com/office/drawing/2014/main" id="{DAD58BE6-4145-6AC4-B04E-1C495A1EA96B}"/>
               </a:ext>
             </a:extLst>
           </p:cNvPr>
@@ -5252,8 +5252,8 @@
         </p:blipFill>
         <p:spPr>
           <a:xfrm>
-            <a:off x="219794" y="2038105"/>
-            <a:ext cx="4537557" cy="2986843"/>
+            <a:off x="134755" y="1980433"/>
+            <a:ext cx="4783234" cy="3148560"/>
           </a:xfrm>
           <a:prstGeom prst="rect">
             <a:avLst/>
@@ -5262,10 +5262,10 @@
       </p:pic>
       <p:pic>
         <p:nvPicPr>
-          <p:cNvPr id="5" name="Picture 4" descr="A graph of different colored lines&#10;&#10;AI-generated content may be incorrect.">
+          <p:cNvPr id="9" name="Picture 8" descr="A graph of different colored lines&#10;&#10;AI-generated content may be incorrect.">
             <a:extLst>
               <a:ext uri="{FF2B5EF4-FFF2-40B4-BE49-F238E27FC236}">
-                <a16:creationId xmlns:a16="http://schemas.microsoft.com/office/drawing/2014/main" id="{A6CC8AD0-E7A2-A807-9D52-BF2DBFB58AFD}"/>
+                <a16:creationId xmlns:a16="http://schemas.microsoft.com/office/drawing/2014/main" id="{D30B7DEC-4F06-B2ED-D86B-76270913DFA2}"/>
               </a:ext>
             </a:extLst>
           </p:cNvPr>
@@ -5288,8 +5288,8 @@
         </p:blipFill>
         <p:spPr>
           <a:xfrm>
-            <a:off x="5040312" y="2038104"/>
-            <a:ext cx="4537558" cy="2986844"/>
+            <a:off x="4917989" y="1980433"/>
+            <a:ext cx="4783234" cy="3148560"/>
           </a:xfrm>
           <a:prstGeom prst="rect">
             <a:avLst/>
@@ -5983,10 +5983,10 @@
       </p:sp>
       <p:pic>
         <p:nvPicPr>
-          <p:cNvPr id="3" name="Picture 2" descr="A graph of different colored lines&#10;&#10;AI-generated content may be incorrect.">
+          <p:cNvPr id="7" name="Picture 6" descr="A graph of different colored lines&#10;&#10;AI-generated content may be incorrect.">
             <a:extLst>
               <a:ext uri="{FF2B5EF4-FFF2-40B4-BE49-F238E27FC236}">
-                <a16:creationId xmlns:a16="http://schemas.microsoft.com/office/drawing/2014/main" id="{82C74B1A-D291-071A-EA1B-82DC1F6B3739}"/>
+                <a16:creationId xmlns:a16="http://schemas.microsoft.com/office/drawing/2014/main" id="{16B54737-EF84-BC8E-7788-7DA57A8AD363}"/>
               </a:ext>
             </a:extLst>
           </p:cNvPr>
@@ -6009,8 +6009,8 @@
         </p:blipFill>
         <p:spPr>
           <a:xfrm>
-            <a:off x="155735" y="2174789"/>
-            <a:ext cx="4756524" cy="3130978"/>
+            <a:off x="77002" y="1912726"/>
+            <a:ext cx="4779203" cy="3145906"/>
           </a:xfrm>
           <a:prstGeom prst="rect">
             <a:avLst/>
@@ -6019,10 +6019,10 @@
       </p:pic>
       <p:pic>
         <p:nvPicPr>
-          <p:cNvPr id="5" name="Picture 4" descr="A graph of different colored lines&#10;&#10;AI-generated content may be incorrect.">
+          <p:cNvPr id="9" name="Picture 8">
             <a:extLst>
               <a:ext uri="{FF2B5EF4-FFF2-40B4-BE49-F238E27FC236}">
-                <a16:creationId xmlns:a16="http://schemas.microsoft.com/office/drawing/2014/main" id="{FC73C473-5C0A-0433-5637-D3A3A00DC58D}"/>
+                <a16:creationId xmlns:a16="http://schemas.microsoft.com/office/drawing/2014/main" id="{91BE6324-1D55-5C97-BCD7-70ECB533D454}"/>
               </a:ext>
             </a:extLst>
           </p:cNvPr>
@@ -6045,8 +6045,8 @@
         </p:blipFill>
         <p:spPr>
           <a:xfrm>
-            <a:off x="5168366" y="2174789"/>
-            <a:ext cx="4756524" cy="3130978"/>
+            <a:off x="5039820" y="1912726"/>
+            <a:ext cx="4779204" cy="3145907"/>
           </a:xfrm>
           <a:prstGeom prst="rect">
             <a:avLst/>
@@ -6241,10 +6241,10 @@
       </p:sp>
       <p:pic>
         <p:nvPicPr>
-          <p:cNvPr id="3" name="Picture 2" descr="A graph of different colored lines&#10;&#10;AI-generated content may be incorrect.">
+          <p:cNvPr id="7" name="Picture 6" descr="A graph of different colored lines&#10;&#10;AI-generated content may be incorrect.">
             <a:extLst>
               <a:ext uri="{FF2B5EF4-FFF2-40B4-BE49-F238E27FC236}">
-                <a16:creationId xmlns:a16="http://schemas.microsoft.com/office/drawing/2014/main" id="{B3A2DC20-1350-C016-A804-B6A190943724}"/>
+                <a16:creationId xmlns:a16="http://schemas.microsoft.com/office/drawing/2014/main" id="{9E508FA7-2F00-F036-E124-AF1C58519FA2}"/>
               </a:ext>
             </a:extLst>
           </p:cNvPr>
@@ -6267,8 +6267,8 @@
         </p:blipFill>
         <p:spPr>
           <a:xfrm>
-            <a:off x="255158" y="2088292"/>
-            <a:ext cx="4437399" cy="2920914"/>
+            <a:off x="167749" y="1909115"/>
+            <a:ext cx="4755244" cy="3130135"/>
           </a:xfrm>
           <a:prstGeom prst="rect">
             <a:avLst/>
@@ -6277,10 +6277,10 @@
       </p:pic>
       <p:pic>
         <p:nvPicPr>
-          <p:cNvPr id="5" name="Picture 4" descr="A graph of different colored lines&#10;&#10;AI-generated content may be incorrect.">
+          <p:cNvPr id="9" name="Picture 8" descr="A graph of different colored lines&#10;&#10;AI-generated content may be incorrect.">
             <a:extLst>
               <a:ext uri="{FF2B5EF4-FFF2-40B4-BE49-F238E27FC236}">
-                <a16:creationId xmlns:a16="http://schemas.microsoft.com/office/drawing/2014/main" id="{5D1E5568-9E51-8512-BAE8-06090BB5EFD5}"/>
+                <a16:creationId xmlns:a16="http://schemas.microsoft.com/office/drawing/2014/main" id="{34EEA8D6-D444-5787-3BD3-A9BE1CFA513F}"/>
               </a:ext>
             </a:extLst>
           </p:cNvPr>
@@ -6303,8 +6303,8 @@
         </p:blipFill>
         <p:spPr>
           <a:xfrm>
-            <a:off x="5276719" y="2088292"/>
-            <a:ext cx="4437399" cy="2920914"/>
+            <a:off x="5040312" y="1909115"/>
+            <a:ext cx="4761215" cy="3134066"/>
           </a:xfrm>
           <a:prstGeom prst="rect">
             <a:avLst/>
